--- a/it/slides/10-Architettura_dei_Calcolatori-Elettronica-Codice.pptx
+++ b/it/slides/10-Architettura_dei_Calcolatori-Elettronica-Codice.pptx
@@ -120,27 +120,31 @@
   <p:extLst>
     <p:ext uri="{521415D9-36F7-43E2-AB2F-B90AF26B5E84}">
       <p14:sectionLst xmlns:p14="http://schemas.microsoft.com/office/powerpoint/2010/main">
-        <p14:section name="Apertura" id="{73a500bd-6b46-8582-6057-df05b6c05f8f}">
+        <p14:section name="Apertura" id="{5f6be81f-f364-3be5-c236-1e62787522f7}">
           <p14:sldIdLst>
             <p14:sldId id="256"/>
             <p14:sldId id="257"/>
           </p14:sldIdLst>
         </p14:section>
-        <p14:section name="I listati" id="{c6d5c56d-5036-5faf-21a3-4c274bfd4b3d}">
+        <p14:section name="Riscaldamento sulla macchina" id="{f83b63d3-2741-c4bb-ba97-9a43774535d9}">
           <p14:sldIdLst>
             <p14:sldId id="258"/>
+          </p14:sldIdLst>
+        </p14:section>
+        <p14:section name="Ritorno alla macchina" id="{bbc23d8b-5245-6f56-3446-4b58bc2db823}">
+          <p14:sldIdLst>
             <p14:sldId id="259"/>
             <p14:sldId id="260"/>
           </p14:sldIdLst>
         </p14:section>
-        <p14:section name="Il programma completo" id="{863f944f-ecc6-f08b-9e2f-f26925871895}">
+        <p14:section name="Il programma completo" id="{96d9bb2a-77f2-5a16-d6b9-95cf72c3aa7a}">
           <p14:sldIdLst>
             <p14:sldId id="261"/>
             <p14:sldId id="262"/>
             <p14:sldId id="263"/>
           </p14:sldIdLst>
         </p14:section>
-        <p14:section name="Eseguire e provare" id="{d8799c66-d1f0-6533-e174-90386e4d3b35}">
+        <p14:section name="Eseguire e provare" id="{22b97171-76cc-db50-2a33-5bb27433ca4d}">
           <p14:sldIdLst>
             <p14:sldId id="264"/>
             <p14:sldId id="265"/>
@@ -149,7 +153,7 @@
             <p14:sldId id="268"/>
           </p14:sldIdLst>
         </p14:section>
-        <p14:section name="Esercizi" id="{0656b983-d363-d16b-3c1f-45af8a34de8a}">
+        <p14:section name="Esercizi" id="{274ff97e-d6d7-9de6-162b-919f090e2dc9}">
           <p14:sldIdLst>
             <p14:sldId id="269"/>
           </p14:sldIdLst>
@@ -2689,7 +2693,63 @@
       </p:sp>
       <p:sp>
         <p:nvSpPr>
-          <p:cNvPr id="11" name="Shape 9"/>
+          <p:cNvPr id="11" name="Text 9"/>
+          <p:cNvSpPr txBox="1"/>
+          <p:nvPr/>
+        </p:nvSpPr>
+        <p:spPr>
+          <a:xfrm>
+            <a:off x="4693615" y="566928"/>
+            <a:ext cx="6949440" cy="640080"/>
+          </a:xfrm>
+          <a:prstGeom prst="rect">
+            <a:avLst/>
+          </a:prstGeom>
+          <a:noFill/>
+          <a:ln/>
+        </p:spPr>
+        <p:txBody>
+          <a:bodyPr wrap="square" lIns="0" tIns="0" rIns="0" bIns="0" rtlCol="0" anchor="t"/>
+          <a:lstStyle/>
+          <a:p>
+            <a:pPr algn="r" indent="0" marL="0">
+              <a:buNone/>
+            </a:pPr>
+            <a:r>
+              <a:rPr lang="en-US" sz="1300" dirty="0">
+                <a:solidFill>
+                  <a:srgbClr val="CFE3EA"/>
+                </a:solidFill>
+                <a:latin typeface="Calibri" pitchFamily="34" charset="0"/>
+                <a:ea typeface="Calibri" pitchFamily="34" charset="-122"/>
+                <a:cs typeface="Calibri" pitchFamily="34" charset="-120"/>
+              </a:rPr>
+              <a:t>Presentazione del codice. I concetti, le figure e le domande sono nella presentazione della lezione:</a:t>
+            </a:r>
+            <a:endParaRPr lang="en-US" sz="1300" dirty="0"/>
+          </a:p>
+          <a:p>
+            <a:pPr algn="r" indent="0" marL="0">
+              <a:buNone/>
+            </a:pPr>
+            <a:r>
+              <a:rPr lang="en-US" sz="1300" dirty="0">
+                <a:solidFill>
+                  <a:srgbClr val="CFE3EA"/>
+                </a:solidFill>
+                <a:latin typeface="Calibri" pitchFamily="34" charset="0"/>
+                <a:ea typeface="Calibri" pitchFamily="34" charset="-122"/>
+                <a:cs typeface="Calibri" pitchFamily="34" charset="-120"/>
+              </a:rPr>
+              <a:t>10-Architettura_dei_Calcolatori-Elettronica.pptx</a:t>
+            </a:r>
+            <a:endParaRPr lang="en-US" sz="1300" dirty="0"/>
+          </a:p>
+        </p:txBody>
+      </p:sp>
+      <p:sp>
+        <p:nvSpPr>
+          <p:cNvPr id="12" name="Shape 10"/>
           <p:cNvSpPr/>
           <p:nvPr/>
         </p:nvSpPr>
@@ -2716,7 +2776,7 @@
       </p:sp>
       <p:pic>
         <p:nvPicPr>
-          <p:cNvPr id="12" name="Image 0" descr="/Users/raffaelemontella/devel/riscv-prg32/computer-architecture-with-prg32/tools/assets/kit_breadboard.png">    </p:cNvPr>
+          <p:cNvPr id="13" name="Image 0" descr="/Users/raffaelemontella/devel/riscv-prg32/computer-architecture-with-prg32/tools/assets/kit_breadboard.png">    </p:cNvPr>
           <p:cNvPicPr>
             <a:picLocks noChangeAspect="1"/>
           </p:cNvPicPr>

--- a/it/slides/10-Architettura_dei_Calcolatori-Elettronica-Codice.pptx
+++ b/it/slides/10-Architettura_dei_Calcolatori-Elettronica-Codice.pptx
@@ -120,31 +120,31 @@
   <p:extLst>
     <p:ext uri="{521415D9-36F7-43E2-AB2F-B90AF26B5E84}">
       <p14:sectionLst xmlns:p14="http://schemas.microsoft.com/office/powerpoint/2010/main">
-        <p14:section name="Apertura" id="{5f6be81f-f364-3be5-c236-1e62787522f7}">
+        <p14:section name="Apertura" id="{deca3e7a-f479-9685-6176-e06b5fe2b85c}">
           <p14:sldIdLst>
             <p14:sldId id="256"/>
             <p14:sldId id="257"/>
           </p14:sldIdLst>
         </p14:section>
-        <p14:section name="Riscaldamento sulla macchina" id="{f83b63d3-2741-c4bb-ba97-9a43774535d9}">
+        <p14:section name="Riscaldamento sulla macchina" id="{b513bbdd-11b3-c4e2-5905-e90d5f5968f8}">
           <p14:sldIdLst>
             <p14:sldId id="258"/>
           </p14:sldIdLst>
         </p14:section>
-        <p14:section name="Ritorno alla macchina" id="{bbc23d8b-5245-6f56-3446-4b58bc2db823}">
+        <p14:section name="Ritorno alla macchina" id="{79a738a7-60c1-ba7a-aceb-759f460a1019}">
           <p14:sldIdLst>
             <p14:sldId id="259"/>
             <p14:sldId id="260"/>
           </p14:sldIdLst>
         </p14:section>
-        <p14:section name="Il programma completo" id="{96d9bb2a-77f2-5a16-d6b9-95cf72c3aa7a}">
+        <p14:section name="Il programma completo" id="{bbc99b38-f833-b007-eab4-688399725308}">
           <p14:sldIdLst>
             <p14:sldId id="261"/>
             <p14:sldId id="262"/>
             <p14:sldId id="263"/>
           </p14:sldIdLst>
         </p14:section>
-        <p14:section name="Eseguire e provare" id="{22b97171-76cc-db50-2a33-5bb27433ca4d}">
+        <p14:section name="Eseguire e provare" id="{c061edb2-f311-9f62-2c92-1385be9fe99b}">
           <p14:sldIdLst>
             <p14:sldId id="264"/>
             <p14:sldId id="265"/>
@@ -153,7 +153,7 @@
             <p14:sldId id="268"/>
           </p14:sldIdLst>
         </p14:section>
-        <p14:section name="Esercizi" id="{274ff97e-d6d7-9de6-162b-919f090e2dc9}">
+        <p14:section name="Esercizi" id="{c1ef6ea5-3420-7285-0377-5627dc806f30}">
           <p14:sldIdLst>
             <p14:sldId id="269"/>
           </p14:sldIdLst>
@@ -562,7 +562,9 @@
           <a:p>
             <a:r>
               <a:rPr lang="en-US" dirty="0"/>
-              <a:t>Questa è la presentazione del codice della Lezione 10. La presentazione della lezione contiene i concetti; questa contiene tutto ciò che si scrive e si esegue: i listati con la loro spiegazione, il programma completo, che cosa mostra, e il modo di provarlo su ciascuno dei tre host.</a:t>
+              <a:t>Questa è la presentazione del codice della Lezione 10. La presentazione della lezione contiene i concetti; questa contiene tutto ciò che si scrive e si esegue: i listati con la loro spiegazione, il programma completo, che cosa mostra, e il modo di provarlo su ciascuno dei tre host.
+Stato di apprendimento: DA COMPRENDERE OGGI, alla fine di questa lezione lo spiegate, lo seguite passo passo e lo applicate da soli; DA UTILIZZARE OGGI, oggi seguite e usate la ricetta; come funziona dentro si spiega più avanti, o non fa parte del corso; DA COMPRENDERE PIÙ AVANTI, riconoscete il nome e lo scopo; lo spiega una lezione successiva. Una slide senza etichetta è contesto: una storia, un esempio, una domanda, un esercizio.
+Stato di apprendimento di questa lezione. DA COMPRENDERE OGGI: gli ingressi con pull-up; tensione, corrente, legge di Ohm; il transistor come interruttore; dai volt ai bit; le porte CMOS. DA UTILIZZARE OGGI: il programma completo, gli strumenti di PRG32 (si usa, non si studia, in questo corso). DA COMPRENDERE PIÙ AVANTI: il clock (Lezione 13). Una slide senza etichetta è contesto: una storia, un esempio, una domanda, un esercizio.</a:t>
             </a:r>
             <a:endParaRPr lang="en-US" dirty="0"/>
           </a:p>
@@ -651,6 +653,7 @@
             <a:r>
               <a:rPr lang="en-US" dirty="0"/>
               <a:t>La via più rapida: PRG32-QT sul vostro computer. Quattro passi, ciascuno con il suo comando. PRG32-QT si comporta come una scheda sulla porta 8080, ed è per questo che il comando di caricamento dice esp32c6. Con la modalità debug abilitata potete fermarvi su qualsiasi istruzione e leggere registri e memoria.
+DA UTILIZZARE OGGI: gli strumenti di PRG32 (si usa, non si studia, in questo corso).
 Per il docente: Eseguito dai test: la cartuccia di questa slide è compilata con questo comando ed eseguita sull'esecutore senza interfaccia di PRG32-QT. Senza la toolchain: importate il file .prg32 in PRG32-QT e scegliete Run Cartridge. Tasti: frecce o WASD per il joystick, Z o J per A, X o K per B, Invio per Start, Esc per tornare a Setup.</a:t>
             </a:r>
             <a:endParaRPr lang="en-US" dirty="0"/>
@@ -740,6 +743,7 @@
             <a:r>
               <a:rPr lang="en-US" dirty="0"/>
               <a:t>Lo stesso programma sull'emulatore. QEMU esegue il firmware vero su un chip emulato, quindi la cartuccia va compilata per l'architettura qemu. Caricate la cartuccia mentre QEMU è chiuso. Il firmware si apre sul menu Setup: scegliete Run Cartridge e lo slot. Ricordate che la tastiera è letta dal terminale, non dalla finestra con l'immagine.
+DA UTILIZZARE OGGI: gli strumenti di PRG32 (si usa, non si studia, in questo corso).
 Per il docente: Verificato dai test fino al caricamento: la cartuccia è compilata per l'architettura qemu e accettata nell'immagine flash dell'emulatore. Ciò che l'emulatore poi mostra non è verificato automaticamente: il QEMU di Espressif ha bisogno della sua finestra. Dall'ottobre 2026 il firmware parte da Setup: scegliete Run Cartridge, poi cart0.</a:t>
             </a:r>
             <a:endParaRPr lang="en-US" dirty="0"/>
@@ -829,6 +833,7 @@
             <a:r>
               <a:rPr lang="en-US" dirty="0"/>
               <a:t>Lo stesso programma sul kit. Il firmware si scrive una volta, via USB; dopo, le cartucce viaggiano sul Wi-Fi. Il comando di caricamento è quello usato per PRG32-QT con l'indirizzo della scheda. È l'unico host che i test automatici non eseguono: provatelo, e riferite ciò che vedete.
+DA UTILIZZARE OGGI: gli strumenti di PRG32 (si usa, non si studia, in questo corso).
 Per il docente: Non eseguito dai test: sulla macchina di prova non c'è una scheda. La cartuccia per l'architettura esp32c6 è compilata dai test; i passi sono quelli della documentazione di PRG32. Se la porta seriale non viene trovata, passatela esplicitamente. Per usare il Wi-Fi dell'aula: python3 -m prg32 wifi set --ssid NOME --password PASSWORD --mode sta.</a:t>
             </a:r>
             <a:endParaRPr lang="en-US" dirty="0"/>
@@ -918,6 +923,7 @@
             <a:r>
               <a:rPr lang="en-US" dirty="0"/>
               <a:t>I cinque sintomi più comuni, che cosa significa ciascuno, e che cosa fare. Leggete il messaggio prima di cambiare qualcosa: quasi sempre nomina la causa.
+DA UTILIZZARE OGGI: gli strumenti di PRG32 (si usa, non si studia, in questo corso).
 Per il docente: Le prime tre righe coprono la maggior parte dei casi. Quando chiedete aiuto, incollate il comando e l'intero messaggio come testo. docs/usage/troubleshooting.md del repository di PRG32 ha l'elenco completo.</a:t>
             </a:r>
             <a:endParaRPr lang="en-US" dirty="0"/>
@@ -1185,6 +1191,7 @@
             <a:r>
               <a:rPr lang="en-US" dirty="0"/>
               <a:t>Nel vostro programma un pulsante premuto è un 1. Sulla scheda il pulsante LEFT è un interruttore tra un piedino del chip, GPIO18, e la massa. Quando è premuto il piedino sta a 0 volt; quando è rilasciato sta a 3,3 volt. Quindi premuto significa 0 volt, eppure il programma legge 1. Le quattro note trasformano questo fatto nelle domande della lezione: che cos'è un volt, perché il piedino rilasciato sta a 3,3 V, e chi decide che 0 V è un bit? L'ultima sezione risponde.
+DA COMPRENDERE OGGI: gli ingressi con pull-up.
 Per il docente: Collegamenti dalla documentazione hardware di PRG32: ogni pulsante è un interruttore verso GND, e il firmware attiva il pull-up interno di ogni ingresso. Il runtime inverte il livello quando costruisce la maschera (prg32_controller.c): piedino basso quando premuto, bit alto. L'ultima sezione della lezione risponde alle quattro note.</a:t>
             </a:r>
             <a:endParaRPr lang="en-US" dirty="0"/>
@@ -1274,6 +1281,7 @@
             <a:r>
               <a:rPr lang="en-US" dirty="0"/>
               <a:t>L'intero viaggio in sette passi. Il dito chiude l'interruttore; il piedino scende a 0 V in meno di un microsecondo; il buffer di ingresso vede una tensione sotto la sua soglia, uno 0 logico; il livello è catturato in un flip-flop; il firmware lo legge con un'istruzione di load, lo inverte e lo impacchetta con gli altri; il vostro programma lo esamina con andi. La colonna di destra dice dove è spiegato ogni passo: tre in questa lezione, gli altri in lezioni già seguite o da seguire. Tra un dito e un bit ci sono sette strati.
+DA COMPRENDERE OGGI: gli ingressi con pull-up.
 Per il docente: I contatti di un interruttore reale rimbalzano per qualche millisecondo quando si chiudono: leggere i pulsanti una volta per frame, ogni poche decine di millisecondi, nasconde il rimbalzo (Lezione 21).</a:t>
             </a:r>
             <a:endParaRPr lang="en-US" dirty="0"/>
@@ -1363,6 +1371,7 @@
             <a:r>
               <a:rPr lang="en-US" dirty="0"/>
               <a:t>Il kit visto come circuito. Una breadboard ha fori collegati a file sul retro, così i componenti si connettono senza saldature. Due lunghe linee portano l'alimentazione, 3,3 V e massa, e una linea separata porta i 5 V per gli amplificatori audio. Ogni parte condivide la stessa massa: senza un riferimento comune le tensioni di due parti non significherebbero nulla l'una per l'altra. I pulsanti vanno da un piedino a massa; display e amplificatori ricevono segnali digitali. Mai collegare direttamente a massa un piedino pilotato alto.
+DA COMPRENDERE OGGI: gli ingressi con pull-up.
 Per il docente: Schema dal repository di PRG32 (docs/hardware/images). Un piedino dell'ESP32-C6 può erogare qualche decina di milliampere: a un LED serve la sua resistenza in serie, come calcolato prima. Mai collegare direttamente a massa un piedino pilotato alto.</a:t>
             </a:r>
             <a:endParaRPr lang="en-US" dirty="0"/>
@@ -1452,6 +1461,7 @@
             <a:r>
               <a:rPr lang="en-US" dirty="0"/>
               <a:t>Una pagina del programma completo, esattamente com'è nel repository. Leggetelo dall'inizio: l'intestazione dice che cosa mostra il programma e come compilarlo; seguono le tre funzioni init, update e draw, poi i dati. Le righe incontrate nei listati della lezione hanno qui gli stessi commenti.
+DA UTILIZZARE OGGI: il programma completo (si usa, non si studia, in questo corso).
 Per il docente: code/l10.S, come viene compilato ed eseguito dai test. I commenti fanno parte del programma, e sono in inglese come in tutti i listati: leggeteli con il codice.</a:t>
             </a:r>
             <a:endParaRPr lang="en-US" dirty="0"/>
@@ -1541,6 +1551,7 @@
             <a:r>
               <a:rPr lang="en-US" dirty="0"/>
               <a:t>Una pagina del programma completo, esattamente com'è nel repository. Leggetelo dall'inizio: l'intestazione dice che cosa mostra il programma e come compilarlo; seguono le tre funzioni init, update e draw, poi i dati. Le righe incontrate nei listati della lezione hanno qui gli stessi commenti.
+DA UTILIZZARE OGGI: il programma completo (si usa, non si studia, in questo corso).
 Per il docente: code/l10.S, come viene compilato ed eseguito dai test. I commenti fanno parte del programma, e sono in inglese come in tutti i listati: leggeteli con il codice.</a:t>
             </a:r>
             <a:endParaRPr lang="en-US" dirty="0"/>
@@ -1630,6 +1641,7 @@
             <a:r>
               <a:rPr lang="en-US" dirty="0"/>
               <a:t>Una pagina del programma completo, esattamente com'è nel repository. Leggetelo dall'inizio: l'intestazione dice che cosa mostra il programma e come compilarlo; seguono le tre funzioni init, update e draw, poi i dati. Le righe incontrate nei listati della lezione hanno qui gli stessi commenti.
+DA UTILIZZARE OGGI: il programma completo (si usa, non si studia, in questo corso).
 Per il docente: code/l10.S, come viene compilato ed eseguito dai test. I commenti fanno parte del programma, e sono in inglese come in tutti i listati: leggeteli con il codice.</a:t>
             </a:r>
             <a:endParaRPr lang="en-US" dirty="0"/>
@@ -2800,6 +2812,420 @@
       </p:pic>
       <p:sp>
         <p:nvSpPr>
+          <p:cNvPr id="14" name="Shape 11"/>
+          <p:cNvSpPr/>
+          <p:nvPr/>
+        </p:nvSpPr>
+        <p:spPr>
+          <a:xfrm>
+            <a:off x="8910777" y="91440"/>
+            <a:ext cx="2732278" cy="274320"/>
+          </a:xfrm>
+          <a:prstGeom prst="rect">
+            <a:avLst/>
+          </a:prstGeom>
+          <a:solidFill>
+            <a:srgbClr val="F3E8FF"/>
+          </a:solidFill>
+          <a:ln w="12700">
+            <a:solidFill>
+              <a:srgbClr val="7E22CE"/>
+            </a:solidFill>
+            <a:prstDash val="dash"/>
+          </a:ln>
+        </p:spPr>
+      </p:sp>
+      <p:sp>
+        <p:nvSpPr>
+          <p:cNvPr id="15" name="Shape 12"/>
+          <p:cNvSpPr/>
+          <p:nvPr/>
+        </p:nvSpPr>
+        <p:spPr>
+          <a:xfrm>
+            <a:off x="8938209" y="128016"/>
+            <a:ext cx="45720" cy="45720"/>
+          </a:xfrm>
+          <a:prstGeom prst="rect">
+            <a:avLst/>
+          </a:prstGeom>
+          <a:solidFill>
+            <a:srgbClr val="7E22CE"/>
+          </a:solidFill>
+          <a:ln w="12700">
+            <a:solidFill>
+              <a:srgbClr val="7E22CE"/>
+            </a:solidFill>
+            <a:prstDash val="solid"/>
+          </a:ln>
+        </p:spPr>
+      </p:sp>
+      <p:sp>
+        <p:nvSpPr>
+          <p:cNvPr id="16" name="Shape 13"/>
+          <p:cNvSpPr/>
+          <p:nvPr/>
+        </p:nvSpPr>
+        <p:spPr>
+          <a:xfrm>
+            <a:off x="8938209" y="205740"/>
+            <a:ext cx="45720" cy="45720"/>
+          </a:xfrm>
+          <a:prstGeom prst="rect">
+            <a:avLst/>
+          </a:prstGeom>
+          <a:solidFill>
+            <a:srgbClr val="7E22CE"/>
+          </a:solidFill>
+          <a:ln w="12700">
+            <a:solidFill>
+              <a:srgbClr val="7E22CE"/>
+            </a:solidFill>
+            <a:prstDash val="solid"/>
+          </a:ln>
+        </p:spPr>
+      </p:sp>
+      <p:sp>
+        <p:nvSpPr>
+          <p:cNvPr id="17" name="Shape 14"/>
+          <p:cNvSpPr/>
+          <p:nvPr/>
+        </p:nvSpPr>
+        <p:spPr>
+          <a:xfrm>
+            <a:off x="8938209" y="283464"/>
+            <a:ext cx="45720" cy="45720"/>
+          </a:xfrm>
+          <a:prstGeom prst="rect">
+            <a:avLst/>
+          </a:prstGeom>
+          <a:solidFill>
+            <a:srgbClr val="7E22CE"/>
+          </a:solidFill>
+          <a:ln w="12700">
+            <a:solidFill>
+              <a:srgbClr val="7E22CE"/>
+            </a:solidFill>
+            <a:prstDash val="solid"/>
+          </a:ln>
+        </p:spPr>
+      </p:sp>
+      <p:pic>
+        <p:nvPicPr>
+          <p:cNvPr id="18" name="Image 1" descr="preencoded.png">    </p:cNvPr>
+          <p:cNvPicPr>
+            <a:picLocks noChangeAspect="1"/>
+          </p:cNvPicPr>
+          <p:nvPr/>
+        </p:nvPicPr>
+        <p:blipFill>
+          <a:blip r:embed="rId2"/>
+          <a:stretch>
+            <a:fillRect/>
+          </a:stretch>
+        </p:blipFill>
+        <p:spPr>
+          <a:xfrm>
+            <a:off x="9038793" y="128016"/>
+            <a:ext cx="201168" cy="201168"/>
+          </a:xfrm>
+          <a:prstGeom prst="rect">
+            <a:avLst/>
+          </a:prstGeom>
+        </p:spPr>
+      </p:pic>
+      <p:sp>
+        <p:nvSpPr>
+          <p:cNvPr id="19" name="Text 15"/>
+          <p:cNvSpPr txBox="1"/>
+          <p:nvPr/>
+        </p:nvSpPr>
+        <p:spPr>
+          <a:xfrm>
+            <a:off x="9294825" y="91440"/>
+            <a:ext cx="2311654" cy="274320"/>
+          </a:xfrm>
+          <a:prstGeom prst="rect">
+            <a:avLst/>
+          </a:prstGeom>
+          <a:noFill/>
+          <a:ln/>
+        </p:spPr>
+        <p:txBody>
+          <a:bodyPr wrap="square" lIns="0" tIns="0" rIns="0" bIns="0" rtlCol="0" anchor="ctr"/>
+          <a:lstStyle/>
+          <a:p>
+            <a:pPr indent="0" marL="0">
+              <a:buNone/>
+            </a:pPr>
+            <a:r>
+              <a:rPr lang="en-US" sz="1100" b="1" dirty="0">
+                <a:solidFill>
+                  <a:srgbClr val="6B21A8"/>
+                </a:solidFill>
+                <a:latin typeface="Calibri" pitchFamily="34" charset="0"/>
+                <a:ea typeface="Calibri" pitchFamily="34" charset="-122"/>
+                <a:cs typeface="Calibri" pitchFamily="34" charset="-120"/>
+              </a:rPr>
+              <a:t>DA COMPRENDERE PIÙ AVANTI</a:t>
+            </a:r>
+            <a:endParaRPr lang="en-US" sz="1100" dirty="0"/>
+          </a:p>
+        </p:txBody>
+      </p:sp>
+      <p:sp>
+        <p:nvSpPr>
+          <p:cNvPr id="20" name="Shape 16"/>
+          <p:cNvSpPr/>
+          <p:nvPr/>
+        </p:nvSpPr>
+        <p:spPr>
+          <a:xfrm>
+            <a:off x="6675069" y="91440"/>
+            <a:ext cx="2125980" cy="274320"/>
+          </a:xfrm>
+          <a:prstGeom prst="rect">
+            <a:avLst/>
+          </a:prstGeom>
+          <a:solidFill>
+            <a:srgbClr val="FEF3C7"/>
+          </a:solidFill>
+          <a:ln w="12700">
+            <a:solidFill>
+              <a:srgbClr val="B45309"/>
+            </a:solidFill>
+            <a:prstDash val="solid"/>
+          </a:ln>
+        </p:spPr>
+      </p:sp>
+      <p:sp>
+        <p:nvSpPr>
+          <p:cNvPr id="21" name="Shape 17"/>
+          <p:cNvSpPr/>
+          <p:nvPr/>
+        </p:nvSpPr>
+        <p:spPr>
+          <a:xfrm>
+            <a:off x="6675069" y="91440"/>
+            <a:ext cx="27432" cy="274320"/>
+          </a:xfrm>
+          <a:prstGeom prst="rect">
+            <a:avLst/>
+          </a:prstGeom>
+          <a:solidFill>
+            <a:srgbClr val="B45309"/>
+          </a:solidFill>
+          <a:ln w="12700">
+            <a:solidFill>
+              <a:srgbClr val="B45309"/>
+            </a:solidFill>
+            <a:prstDash val="solid"/>
+          </a:ln>
+        </p:spPr>
+      </p:sp>
+      <p:sp>
+        <p:nvSpPr>
+          <p:cNvPr id="22" name="Shape 18"/>
+          <p:cNvSpPr/>
+          <p:nvPr/>
+        </p:nvSpPr>
+        <p:spPr>
+          <a:xfrm>
+            <a:off x="6729933" y="91440"/>
+            <a:ext cx="27432" cy="274320"/>
+          </a:xfrm>
+          <a:prstGeom prst="rect">
+            <a:avLst/>
+          </a:prstGeom>
+          <a:solidFill>
+            <a:srgbClr val="B45309"/>
+          </a:solidFill>
+          <a:ln w="12700">
+            <a:solidFill>
+              <a:srgbClr val="B45309"/>
+            </a:solidFill>
+            <a:prstDash val="solid"/>
+          </a:ln>
+        </p:spPr>
+      </p:sp>
+      <p:pic>
+        <p:nvPicPr>
+          <p:cNvPr id="23" name="Image 2" descr="preencoded.png">    </p:cNvPr>
+          <p:cNvPicPr>
+            <a:picLocks noChangeAspect="1"/>
+          </p:cNvPicPr>
+          <p:nvPr/>
+        </p:nvPicPr>
+        <p:blipFill>
+          <a:blip r:embed="rId3"/>
+          <a:stretch>
+            <a:fillRect/>
+          </a:stretch>
+        </p:blipFill>
+        <p:spPr>
+          <a:xfrm>
+            <a:off x="6803085" y="128016"/>
+            <a:ext cx="201168" cy="201168"/>
+          </a:xfrm>
+          <a:prstGeom prst="rect">
+            <a:avLst/>
+          </a:prstGeom>
+        </p:spPr>
+      </p:pic>
+      <p:sp>
+        <p:nvSpPr>
+          <p:cNvPr id="24" name="Text 19"/>
+          <p:cNvSpPr txBox="1"/>
+          <p:nvPr/>
+        </p:nvSpPr>
+        <p:spPr>
+          <a:xfrm>
+            <a:off x="7059117" y="91440"/>
+            <a:ext cx="1705356" cy="274320"/>
+          </a:xfrm>
+          <a:prstGeom prst="rect">
+            <a:avLst/>
+          </a:prstGeom>
+          <a:noFill/>
+          <a:ln/>
+        </p:spPr>
+        <p:txBody>
+          <a:bodyPr wrap="square" lIns="0" tIns="0" rIns="0" bIns="0" rtlCol="0" anchor="ctr"/>
+          <a:lstStyle/>
+          <a:p>
+            <a:pPr indent="0" marL="0">
+              <a:buNone/>
+            </a:pPr>
+            <a:r>
+              <a:rPr lang="en-US" sz="1100" b="1" dirty="0">
+                <a:solidFill>
+                  <a:srgbClr val="92400E"/>
+                </a:solidFill>
+                <a:latin typeface="Calibri" pitchFamily="34" charset="0"/>
+                <a:ea typeface="Calibri" pitchFamily="34" charset="-122"/>
+                <a:cs typeface="Calibri" pitchFamily="34" charset="-120"/>
+              </a:rPr>
+              <a:t>DA UTILIZZARE OGGI</a:t>
+            </a:r>
+            <a:endParaRPr lang="en-US" sz="1100" dirty="0"/>
+          </a:p>
+        </p:txBody>
+      </p:sp>
+      <p:sp>
+        <p:nvSpPr>
+          <p:cNvPr id="25" name="Shape 20"/>
+          <p:cNvSpPr/>
+          <p:nvPr/>
+        </p:nvSpPr>
+        <p:spPr>
+          <a:xfrm>
+            <a:off x="4352747" y="91440"/>
+            <a:ext cx="2212594" cy="274320"/>
+          </a:xfrm>
+          <a:prstGeom prst="rect">
+            <a:avLst/>
+          </a:prstGeom>
+          <a:solidFill>
+            <a:srgbClr val="E0F2FE"/>
+          </a:solidFill>
+          <a:ln w="12700">
+            <a:solidFill>
+              <a:srgbClr val="0369A1"/>
+            </a:solidFill>
+            <a:prstDash val="solid"/>
+          </a:ln>
+        </p:spPr>
+      </p:sp>
+      <p:sp>
+        <p:nvSpPr>
+          <p:cNvPr id="26" name="Shape 21"/>
+          <p:cNvSpPr/>
+          <p:nvPr/>
+        </p:nvSpPr>
+        <p:spPr>
+          <a:xfrm>
+            <a:off x="4352747" y="91440"/>
+            <a:ext cx="73152" cy="274320"/>
+          </a:xfrm>
+          <a:prstGeom prst="rect">
+            <a:avLst/>
+          </a:prstGeom>
+          <a:solidFill>
+            <a:srgbClr val="0369A1"/>
+          </a:solidFill>
+          <a:ln w="12700">
+            <a:solidFill>
+              <a:srgbClr val="0369A1"/>
+            </a:solidFill>
+            <a:prstDash val="solid"/>
+          </a:ln>
+        </p:spPr>
+      </p:sp>
+      <p:pic>
+        <p:nvPicPr>
+          <p:cNvPr id="27" name="Image 3" descr="preencoded.png">    </p:cNvPr>
+          <p:cNvPicPr>
+            <a:picLocks noChangeAspect="1"/>
+          </p:cNvPicPr>
+          <p:nvPr/>
+        </p:nvPicPr>
+        <p:blipFill>
+          <a:blip r:embed="rId4"/>
+          <a:stretch>
+            <a:fillRect/>
+          </a:stretch>
+        </p:blipFill>
+        <p:spPr>
+          <a:xfrm>
+            <a:off x="4480763" y="128016"/>
+            <a:ext cx="201168" cy="201168"/>
+          </a:xfrm>
+          <a:prstGeom prst="rect">
+            <a:avLst/>
+          </a:prstGeom>
+        </p:spPr>
+      </p:pic>
+      <p:sp>
+        <p:nvSpPr>
+          <p:cNvPr id="28" name="Text 22"/>
+          <p:cNvSpPr txBox="1"/>
+          <p:nvPr/>
+        </p:nvSpPr>
+        <p:spPr>
+          <a:xfrm>
+            <a:off x="4736795" y="91440"/>
+            <a:ext cx="1791970" cy="274320"/>
+          </a:xfrm>
+          <a:prstGeom prst="rect">
+            <a:avLst/>
+          </a:prstGeom>
+          <a:noFill/>
+          <a:ln/>
+        </p:spPr>
+        <p:txBody>
+          <a:bodyPr wrap="square" lIns="0" tIns="0" rIns="0" bIns="0" rtlCol="0" anchor="ctr"/>
+          <a:lstStyle/>
+          <a:p>
+            <a:pPr indent="0" marL="0">
+              <a:buNone/>
+            </a:pPr>
+            <a:r>
+              <a:rPr lang="en-US" sz="1100" b="1" dirty="0">
+                <a:solidFill>
+                  <a:srgbClr val="075985"/>
+                </a:solidFill>
+                <a:latin typeface="Calibri" pitchFamily="34" charset="0"/>
+                <a:ea typeface="Calibri" pitchFamily="34" charset="-122"/>
+                <a:cs typeface="Calibri" pitchFamily="34" charset="-120"/>
+              </a:rPr>
+              <a:t>DA COMPRENDERE OGGI</a:t>
+            </a:r>
+            <a:endParaRPr lang="en-US" sz="1100" dirty="0"/>
+          </a:p>
+        </p:txBody>
+      </p:sp>
+      <p:sp>
+        <p:nvSpPr>
           <p:cNvPr id="25" name="Slide Number Placeholder 0"/>
           <p:cNvSpPr>
             <a:spLocks noGrp="1"/>
@@ -3602,6 +4028,158 @@
       </p:sp>
       <p:sp>
         <p:nvSpPr>
+          <p:cNvPr id="17" name="Shape 15"/>
+          <p:cNvSpPr/>
+          <p:nvPr/>
+        </p:nvSpPr>
+        <p:spPr>
+          <a:xfrm>
+            <a:off x="7875600" y="91440"/>
+            <a:ext cx="3767455" cy="274320"/>
+          </a:xfrm>
+          <a:prstGeom prst="rect">
+            <a:avLst/>
+          </a:prstGeom>
+          <a:solidFill>
+            <a:srgbClr val="FEF3C7"/>
+          </a:solidFill>
+          <a:ln w="12700">
+            <a:solidFill>
+              <a:srgbClr val="B45309"/>
+            </a:solidFill>
+            <a:prstDash val="solid"/>
+          </a:ln>
+        </p:spPr>
+      </p:sp>
+      <p:sp>
+        <p:nvSpPr>
+          <p:cNvPr id="18" name="Shape 16"/>
+          <p:cNvSpPr/>
+          <p:nvPr/>
+        </p:nvSpPr>
+        <p:spPr>
+          <a:xfrm>
+            <a:off x="7875600" y="91440"/>
+            <a:ext cx="27432" cy="274320"/>
+          </a:xfrm>
+          <a:prstGeom prst="rect">
+            <a:avLst/>
+          </a:prstGeom>
+          <a:solidFill>
+            <a:srgbClr val="B45309"/>
+          </a:solidFill>
+          <a:ln w="12700">
+            <a:solidFill>
+              <a:srgbClr val="B45309"/>
+            </a:solidFill>
+            <a:prstDash val="solid"/>
+          </a:ln>
+        </p:spPr>
+      </p:sp>
+      <p:sp>
+        <p:nvSpPr>
+          <p:cNvPr id="19" name="Shape 17"/>
+          <p:cNvSpPr/>
+          <p:nvPr/>
+        </p:nvSpPr>
+        <p:spPr>
+          <a:xfrm>
+            <a:off x="7930464" y="91440"/>
+            <a:ext cx="27432" cy="274320"/>
+          </a:xfrm>
+          <a:prstGeom prst="rect">
+            <a:avLst/>
+          </a:prstGeom>
+          <a:solidFill>
+            <a:srgbClr val="B45309"/>
+          </a:solidFill>
+          <a:ln w="12700">
+            <a:solidFill>
+              <a:srgbClr val="B45309"/>
+            </a:solidFill>
+            <a:prstDash val="solid"/>
+          </a:ln>
+        </p:spPr>
+      </p:sp>
+      <p:pic>
+        <p:nvPicPr>
+          <p:cNvPr id="20" name="Image 0" descr="preencoded.png">    </p:cNvPr>
+          <p:cNvPicPr>
+            <a:picLocks noChangeAspect="1"/>
+          </p:cNvPicPr>
+          <p:nvPr/>
+        </p:nvPicPr>
+        <p:blipFill>
+          <a:blip r:embed="rId1"/>
+          <a:stretch>
+            <a:fillRect/>
+          </a:stretch>
+        </p:blipFill>
+        <p:spPr>
+          <a:xfrm>
+            <a:off x="8003616" y="128016"/>
+            <a:ext cx="201168" cy="201168"/>
+          </a:xfrm>
+          <a:prstGeom prst="rect">
+            <a:avLst/>
+          </a:prstGeom>
+        </p:spPr>
+      </p:pic>
+      <p:sp>
+        <p:nvSpPr>
+          <p:cNvPr id="21" name="Text 18"/>
+          <p:cNvSpPr txBox="1"/>
+          <p:nvPr/>
+        </p:nvSpPr>
+        <p:spPr>
+          <a:xfrm>
+            <a:off x="8259648" y="91440"/>
+            <a:ext cx="3346831" cy="274320"/>
+          </a:xfrm>
+          <a:prstGeom prst="rect">
+            <a:avLst/>
+          </a:prstGeom>
+          <a:noFill/>
+          <a:ln/>
+        </p:spPr>
+        <p:txBody>
+          <a:bodyPr wrap="square" lIns="0" tIns="0" rIns="0" bIns="0" rtlCol="0" anchor="ctr"/>
+          <a:lstStyle/>
+          <a:p>
+            <a:pPr indent="0" marL="0">
+              <a:buNone/>
+            </a:pPr>
+            <a:r>
+              <a:rPr lang="en-US" sz="1100" b="1" dirty="0">
+                <a:solidFill>
+                  <a:srgbClr val="92400E"/>
+                </a:solidFill>
+                <a:latin typeface="Calibri" pitchFamily="34" charset="0"/>
+                <a:ea typeface="Calibri" pitchFamily="34" charset="-122"/>
+                <a:cs typeface="Calibri" pitchFamily="34" charset="-120"/>
+              </a:rPr>
+              <a:t>DA UTILIZZARE OGGI</a:t>
+            </a:r>
+            <a:pPr indent="0" marL="0">
+              <a:buNone/>
+            </a:pPr>
+            <a:r>
+              <a:rPr lang="en-US" sz="1100" dirty="0">
+                <a:solidFill>
+                  <a:srgbClr val="92400E"/>
+                </a:solidFill>
+                <a:latin typeface="Calibri" pitchFamily="34" charset="0"/>
+                <a:ea typeface="Calibri" pitchFamily="34" charset="-122"/>
+                <a:cs typeface="Calibri" pitchFamily="34" charset="-120"/>
+              </a:rPr>
+              <a:t> · gli strumenti di PRG32</a:t>
+            </a:r>
+            <a:endParaRPr lang="en-US" sz="1100" dirty="0"/>
+          </a:p>
+        </p:txBody>
+      </p:sp>
+      <p:sp>
+        <p:nvSpPr>
           <p:cNvPr id="25" name="Slide Number Placeholder 0"/>
           <p:cNvSpPr>
             <a:spLocks noGrp="1"/>
@@ -4438,6 +5016,158 @@
       </p:sp>
       <p:sp>
         <p:nvSpPr>
+          <p:cNvPr id="17" name="Shape 15"/>
+          <p:cNvSpPr/>
+          <p:nvPr/>
+        </p:nvSpPr>
+        <p:spPr>
+          <a:xfrm>
+            <a:off x="7875600" y="91440"/>
+            <a:ext cx="3767455" cy="274320"/>
+          </a:xfrm>
+          <a:prstGeom prst="rect">
+            <a:avLst/>
+          </a:prstGeom>
+          <a:solidFill>
+            <a:srgbClr val="FEF3C7"/>
+          </a:solidFill>
+          <a:ln w="12700">
+            <a:solidFill>
+              <a:srgbClr val="B45309"/>
+            </a:solidFill>
+            <a:prstDash val="solid"/>
+          </a:ln>
+        </p:spPr>
+      </p:sp>
+      <p:sp>
+        <p:nvSpPr>
+          <p:cNvPr id="18" name="Shape 16"/>
+          <p:cNvSpPr/>
+          <p:nvPr/>
+        </p:nvSpPr>
+        <p:spPr>
+          <a:xfrm>
+            <a:off x="7875600" y="91440"/>
+            <a:ext cx="27432" cy="274320"/>
+          </a:xfrm>
+          <a:prstGeom prst="rect">
+            <a:avLst/>
+          </a:prstGeom>
+          <a:solidFill>
+            <a:srgbClr val="B45309"/>
+          </a:solidFill>
+          <a:ln w="12700">
+            <a:solidFill>
+              <a:srgbClr val="B45309"/>
+            </a:solidFill>
+            <a:prstDash val="solid"/>
+          </a:ln>
+        </p:spPr>
+      </p:sp>
+      <p:sp>
+        <p:nvSpPr>
+          <p:cNvPr id="19" name="Shape 17"/>
+          <p:cNvSpPr/>
+          <p:nvPr/>
+        </p:nvSpPr>
+        <p:spPr>
+          <a:xfrm>
+            <a:off x="7930464" y="91440"/>
+            <a:ext cx="27432" cy="274320"/>
+          </a:xfrm>
+          <a:prstGeom prst="rect">
+            <a:avLst/>
+          </a:prstGeom>
+          <a:solidFill>
+            <a:srgbClr val="B45309"/>
+          </a:solidFill>
+          <a:ln w="12700">
+            <a:solidFill>
+              <a:srgbClr val="B45309"/>
+            </a:solidFill>
+            <a:prstDash val="solid"/>
+          </a:ln>
+        </p:spPr>
+      </p:sp>
+      <p:pic>
+        <p:nvPicPr>
+          <p:cNvPr id="20" name="Image 0" descr="preencoded.png">    </p:cNvPr>
+          <p:cNvPicPr>
+            <a:picLocks noChangeAspect="1"/>
+          </p:cNvPicPr>
+          <p:nvPr/>
+        </p:nvPicPr>
+        <p:blipFill>
+          <a:blip r:embed="rId1"/>
+          <a:stretch>
+            <a:fillRect/>
+          </a:stretch>
+        </p:blipFill>
+        <p:spPr>
+          <a:xfrm>
+            <a:off x="8003616" y="128016"/>
+            <a:ext cx="201168" cy="201168"/>
+          </a:xfrm>
+          <a:prstGeom prst="rect">
+            <a:avLst/>
+          </a:prstGeom>
+        </p:spPr>
+      </p:pic>
+      <p:sp>
+        <p:nvSpPr>
+          <p:cNvPr id="21" name="Text 18"/>
+          <p:cNvSpPr txBox="1"/>
+          <p:nvPr/>
+        </p:nvSpPr>
+        <p:spPr>
+          <a:xfrm>
+            <a:off x="8259648" y="91440"/>
+            <a:ext cx="3346831" cy="274320"/>
+          </a:xfrm>
+          <a:prstGeom prst="rect">
+            <a:avLst/>
+          </a:prstGeom>
+          <a:noFill/>
+          <a:ln/>
+        </p:spPr>
+        <p:txBody>
+          <a:bodyPr wrap="square" lIns="0" tIns="0" rIns="0" bIns="0" rtlCol="0" anchor="ctr"/>
+          <a:lstStyle/>
+          <a:p>
+            <a:pPr indent="0" marL="0">
+              <a:buNone/>
+            </a:pPr>
+            <a:r>
+              <a:rPr lang="en-US" sz="1100" b="1" dirty="0">
+                <a:solidFill>
+                  <a:srgbClr val="92400E"/>
+                </a:solidFill>
+                <a:latin typeface="Calibri" pitchFamily="34" charset="0"/>
+                <a:ea typeface="Calibri" pitchFamily="34" charset="-122"/>
+                <a:cs typeface="Calibri" pitchFamily="34" charset="-120"/>
+              </a:rPr>
+              <a:t>DA UTILIZZARE OGGI</a:t>
+            </a:r>
+            <a:pPr indent="0" marL="0">
+              <a:buNone/>
+            </a:pPr>
+            <a:r>
+              <a:rPr lang="en-US" sz="1100" dirty="0">
+                <a:solidFill>
+                  <a:srgbClr val="92400E"/>
+                </a:solidFill>
+                <a:latin typeface="Calibri" pitchFamily="34" charset="0"/>
+                <a:ea typeface="Calibri" pitchFamily="34" charset="-122"/>
+                <a:cs typeface="Calibri" pitchFamily="34" charset="-120"/>
+              </a:rPr>
+              <a:t> · gli strumenti di PRG32</a:t>
+            </a:r>
+            <a:endParaRPr lang="en-US" sz="1100" dirty="0"/>
+          </a:p>
+        </p:txBody>
+      </p:sp>
+      <p:sp>
+        <p:nvSpPr>
           <p:cNvPr id="25" name="Slide Number Placeholder 0"/>
           <p:cNvSpPr>
             <a:spLocks noGrp="1"/>
@@ -5267,6 +5997,158 @@
                 <a:cs typeface="Calibri" pitchFamily="34" charset="-120"/>
               </a:rPr>
               <a:t>Schermo nero: confrontate il cablaggio del display con il firmware</a:t>
+            </a:r>
+            <a:endParaRPr lang="en-US" sz="1100" dirty="0"/>
+          </a:p>
+        </p:txBody>
+      </p:sp>
+      <p:sp>
+        <p:nvSpPr>
+          <p:cNvPr id="17" name="Shape 15"/>
+          <p:cNvSpPr/>
+          <p:nvPr/>
+        </p:nvSpPr>
+        <p:spPr>
+          <a:xfrm>
+            <a:off x="7875600" y="91440"/>
+            <a:ext cx="3767455" cy="274320"/>
+          </a:xfrm>
+          <a:prstGeom prst="rect">
+            <a:avLst/>
+          </a:prstGeom>
+          <a:solidFill>
+            <a:srgbClr val="FEF3C7"/>
+          </a:solidFill>
+          <a:ln w="12700">
+            <a:solidFill>
+              <a:srgbClr val="B45309"/>
+            </a:solidFill>
+            <a:prstDash val="solid"/>
+          </a:ln>
+        </p:spPr>
+      </p:sp>
+      <p:sp>
+        <p:nvSpPr>
+          <p:cNvPr id="18" name="Shape 16"/>
+          <p:cNvSpPr/>
+          <p:nvPr/>
+        </p:nvSpPr>
+        <p:spPr>
+          <a:xfrm>
+            <a:off x="7875600" y="91440"/>
+            <a:ext cx="27432" cy="274320"/>
+          </a:xfrm>
+          <a:prstGeom prst="rect">
+            <a:avLst/>
+          </a:prstGeom>
+          <a:solidFill>
+            <a:srgbClr val="B45309"/>
+          </a:solidFill>
+          <a:ln w="12700">
+            <a:solidFill>
+              <a:srgbClr val="B45309"/>
+            </a:solidFill>
+            <a:prstDash val="solid"/>
+          </a:ln>
+        </p:spPr>
+      </p:sp>
+      <p:sp>
+        <p:nvSpPr>
+          <p:cNvPr id="19" name="Shape 17"/>
+          <p:cNvSpPr/>
+          <p:nvPr/>
+        </p:nvSpPr>
+        <p:spPr>
+          <a:xfrm>
+            <a:off x="7930464" y="91440"/>
+            <a:ext cx="27432" cy="274320"/>
+          </a:xfrm>
+          <a:prstGeom prst="rect">
+            <a:avLst/>
+          </a:prstGeom>
+          <a:solidFill>
+            <a:srgbClr val="B45309"/>
+          </a:solidFill>
+          <a:ln w="12700">
+            <a:solidFill>
+              <a:srgbClr val="B45309"/>
+            </a:solidFill>
+            <a:prstDash val="solid"/>
+          </a:ln>
+        </p:spPr>
+      </p:sp>
+      <p:pic>
+        <p:nvPicPr>
+          <p:cNvPr id="20" name="Image 0" descr="preencoded.png">    </p:cNvPr>
+          <p:cNvPicPr>
+            <a:picLocks noChangeAspect="1"/>
+          </p:cNvPicPr>
+          <p:nvPr/>
+        </p:nvPicPr>
+        <p:blipFill>
+          <a:blip r:embed="rId1"/>
+          <a:stretch>
+            <a:fillRect/>
+          </a:stretch>
+        </p:blipFill>
+        <p:spPr>
+          <a:xfrm>
+            <a:off x="8003616" y="128016"/>
+            <a:ext cx="201168" cy="201168"/>
+          </a:xfrm>
+          <a:prstGeom prst="rect">
+            <a:avLst/>
+          </a:prstGeom>
+        </p:spPr>
+      </p:pic>
+      <p:sp>
+        <p:nvSpPr>
+          <p:cNvPr id="21" name="Text 18"/>
+          <p:cNvSpPr txBox="1"/>
+          <p:nvPr/>
+        </p:nvSpPr>
+        <p:spPr>
+          <a:xfrm>
+            <a:off x="8259648" y="91440"/>
+            <a:ext cx="3346831" cy="274320"/>
+          </a:xfrm>
+          <a:prstGeom prst="rect">
+            <a:avLst/>
+          </a:prstGeom>
+          <a:noFill/>
+          <a:ln/>
+        </p:spPr>
+        <p:txBody>
+          <a:bodyPr wrap="square" lIns="0" tIns="0" rIns="0" bIns="0" rtlCol="0" anchor="ctr"/>
+          <a:lstStyle/>
+          <a:p>
+            <a:pPr indent="0" marL="0">
+              <a:buNone/>
+            </a:pPr>
+            <a:r>
+              <a:rPr lang="en-US" sz="1100" b="1" dirty="0">
+                <a:solidFill>
+                  <a:srgbClr val="92400E"/>
+                </a:solidFill>
+                <a:latin typeface="Calibri" pitchFamily="34" charset="0"/>
+                <a:ea typeface="Calibri" pitchFamily="34" charset="-122"/>
+                <a:cs typeface="Calibri" pitchFamily="34" charset="-120"/>
+              </a:rPr>
+              <a:t>DA UTILIZZARE OGGI</a:t>
+            </a:r>
+            <a:pPr indent="0" marL="0">
+              <a:buNone/>
+            </a:pPr>
+            <a:r>
+              <a:rPr lang="en-US" sz="1100" dirty="0">
+                <a:solidFill>
+                  <a:srgbClr val="92400E"/>
+                </a:solidFill>
+                <a:latin typeface="Calibri" pitchFamily="34" charset="0"/>
+                <a:ea typeface="Calibri" pitchFamily="34" charset="-122"/>
+                <a:cs typeface="Calibri" pitchFamily="34" charset="-120"/>
+              </a:rPr>
+              <a:t> · gli strumenti di PRG32</a:t>
             </a:r>
             <a:endParaRPr lang="en-US" sz="1100" dirty="0"/>
           </a:p>
@@ -6655,6 +7537,158 @@
       </p:graphicFrame>
       <p:sp>
         <p:nvSpPr>
+          <p:cNvPr id="4" name="Shape 1"/>
+          <p:cNvSpPr/>
+          <p:nvPr/>
+        </p:nvSpPr>
+        <p:spPr>
+          <a:xfrm>
+            <a:off x="7875600" y="91440"/>
+            <a:ext cx="3767455" cy="274320"/>
+          </a:xfrm>
+          <a:prstGeom prst="rect">
+            <a:avLst/>
+          </a:prstGeom>
+          <a:solidFill>
+            <a:srgbClr val="FEF3C7"/>
+          </a:solidFill>
+          <a:ln w="12700">
+            <a:solidFill>
+              <a:srgbClr val="B45309"/>
+            </a:solidFill>
+            <a:prstDash val="solid"/>
+          </a:ln>
+        </p:spPr>
+      </p:sp>
+      <p:sp>
+        <p:nvSpPr>
+          <p:cNvPr id="5" name="Shape 2"/>
+          <p:cNvSpPr/>
+          <p:nvPr/>
+        </p:nvSpPr>
+        <p:spPr>
+          <a:xfrm>
+            <a:off x="7875600" y="91440"/>
+            <a:ext cx="27432" cy="274320"/>
+          </a:xfrm>
+          <a:prstGeom prst="rect">
+            <a:avLst/>
+          </a:prstGeom>
+          <a:solidFill>
+            <a:srgbClr val="B45309"/>
+          </a:solidFill>
+          <a:ln w="12700">
+            <a:solidFill>
+              <a:srgbClr val="B45309"/>
+            </a:solidFill>
+            <a:prstDash val="solid"/>
+          </a:ln>
+        </p:spPr>
+      </p:sp>
+      <p:sp>
+        <p:nvSpPr>
+          <p:cNvPr id="6" name="Shape 3"/>
+          <p:cNvSpPr/>
+          <p:nvPr/>
+        </p:nvSpPr>
+        <p:spPr>
+          <a:xfrm>
+            <a:off x="7930464" y="91440"/>
+            <a:ext cx="27432" cy="274320"/>
+          </a:xfrm>
+          <a:prstGeom prst="rect">
+            <a:avLst/>
+          </a:prstGeom>
+          <a:solidFill>
+            <a:srgbClr val="B45309"/>
+          </a:solidFill>
+          <a:ln w="12700">
+            <a:solidFill>
+              <a:srgbClr val="B45309"/>
+            </a:solidFill>
+            <a:prstDash val="solid"/>
+          </a:ln>
+        </p:spPr>
+      </p:sp>
+      <p:pic>
+        <p:nvPicPr>
+          <p:cNvPr id="7" name="Image 0" descr="preencoded.png">    </p:cNvPr>
+          <p:cNvPicPr>
+            <a:picLocks noChangeAspect="1"/>
+          </p:cNvPicPr>
+          <p:nvPr/>
+        </p:nvPicPr>
+        <p:blipFill>
+          <a:blip r:embed="rId1"/>
+          <a:stretch>
+            <a:fillRect/>
+          </a:stretch>
+        </p:blipFill>
+        <p:spPr>
+          <a:xfrm>
+            <a:off x="8003616" y="128016"/>
+            <a:ext cx="201168" cy="201168"/>
+          </a:xfrm>
+          <a:prstGeom prst="rect">
+            <a:avLst/>
+          </a:prstGeom>
+        </p:spPr>
+      </p:pic>
+      <p:sp>
+        <p:nvSpPr>
+          <p:cNvPr id="8" name="Text 4"/>
+          <p:cNvSpPr txBox="1"/>
+          <p:nvPr/>
+        </p:nvSpPr>
+        <p:spPr>
+          <a:xfrm>
+            <a:off x="8259648" y="91440"/>
+            <a:ext cx="3346831" cy="274320"/>
+          </a:xfrm>
+          <a:prstGeom prst="rect">
+            <a:avLst/>
+          </a:prstGeom>
+          <a:noFill/>
+          <a:ln/>
+        </p:spPr>
+        <p:txBody>
+          <a:bodyPr wrap="square" lIns="0" tIns="0" rIns="0" bIns="0" rtlCol="0" anchor="ctr"/>
+          <a:lstStyle/>
+          <a:p>
+            <a:pPr indent="0" marL="0">
+              <a:buNone/>
+            </a:pPr>
+            <a:r>
+              <a:rPr lang="en-US" sz="1100" b="1" dirty="0">
+                <a:solidFill>
+                  <a:srgbClr val="92400E"/>
+                </a:solidFill>
+                <a:latin typeface="Calibri" pitchFamily="34" charset="0"/>
+                <a:ea typeface="Calibri" pitchFamily="34" charset="-122"/>
+                <a:cs typeface="Calibri" pitchFamily="34" charset="-120"/>
+              </a:rPr>
+              <a:t>DA UTILIZZARE OGGI</a:t>
+            </a:r>
+            <a:pPr indent="0" marL="0">
+              <a:buNone/>
+            </a:pPr>
+            <a:r>
+              <a:rPr lang="en-US" sz="1100" dirty="0">
+                <a:solidFill>
+                  <a:srgbClr val="92400E"/>
+                </a:solidFill>
+                <a:latin typeface="Calibri" pitchFamily="34" charset="0"/>
+                <a:ea typeface="Calibri" pitchFamily="34" charset="-122"/>
+                <a:cs typeface="Calibri" pitchFamily="34" charset="-120"/>
+              </a:rPr>
+              <a:t> · gli strumenti di PRG32</a:t>
+            </a:r>
+            <a:endParaRPr lang="en-US" sz="1100" dirty="0"/>
+          </a:p>
+        </p:txBody>
+      </p:sp>
+      <p:sp>
+        <p:nvSpPr>
           <p:cNvPr id="25" name="Slide Number Placeholder 0"/>
           <p:cNvSpPr>
             <a:spLocks noGrp="1"/>
@@ -8761,6 +9795,133 @@
               <a:t>Che cos'è un volt, perché il piedino rilasciato sta a 3,3 V, e chi decide che 0 V è un bit?</a:t>
             </a:r>
             <a:endParaRPr lang="en-US" sz="1200" dirty="0"/>
+          </a:p>
+        </p:txBody>
+      </p:sp>
+      <p:sp>
+        <p:nvSpPr>
+          <p:cNvPr id="17" name="Shape 15"/>
+          <p:cNvSpPr/>
+          <p:nvPr/>
+        </p:nvSpPr>
+        <p:spPr>
+          <a:xfrm>
+            <a:off x="7657668" y="91440"/>
+            <a:ext cx="3985387" cy="274320"/>
+          </a:xfrm>
+          <a:prstGeom prst="rect">
+            <a:avLst/>
+          </a:prstGeom>
+          <a:solidFill>
+            <a:srgbClr val="E0F2FE"/>
+          </a:solidFill>
+          <a:ln w="12700">
+            <a:solidFill>
+              <a:srgbClr val="0369A1"/>
+            </a:solidFill>
+            <a:prstDash val="solid"/>
+          </a:ln>
+        </p:spPr>
+      </p:sp>
+      <p:sp>
+        <p:nvSpPr>
+          <p:cNvPr id="18" name="Shape 16"/>
+          <p:cNvSpPr/>
+          <p:nvPr/>
+        </p:nvSpPr>
+        <p:spPr>
+          <a:xfrm>
+            <a:off x="7657668" y="91440"/>
+            <a:ext cx="73152" cy="274320"/>
+          </a:xfrm>
+          <a:prstGeom prst="rect">
+            <a:avLst/>
+          </a:prstGeom>
+          <a:solidFill>
+            <a:srgbClr val="0369A1"/>
+          </a:solidFill>
+          <a:ln w="12700">
+            <a:solidFill>
+              <a:srgbClr val="0369A1"/>
+            </a:solidFill>
+            <a:prstDash val="solid"/>
+          </a:ln>
+        </p:spPr>
+      </p:sp>
+      <p:pic>
+        <p:nvPicPr>
+          <p:cNvPr id="19" name="Image 0" descr="preencoded.png">    </p:cNvPr>
+          <p:cNvPicPr>
+            <a:picLocks noChangeAspect="1"/>
+          </p:cNvPicPr>
+          <p:nvPr/>
+        </p:nvPicPr>
+        <p:blipFill>
+          <a:blip r:embed="rId1"/>
+          <a:stretch>
+            <a:fillRect/>
+          </a:stretch>
+        </p:blipFill>
+        <p:spPr>
+          <a:xfrm>
+            <a:off x="7785684" y="128016"/>
+            <a:ext cx="201168" cy="201168"/>
+          </a:xfrm>
+          <a:prstGeom prst="rect">
+            <a:avLst/>
+          </a:prstGeom>
+        </p:spPr>
+      </p:pic>
+      <p:sp>
+        <p:nvSpPr>
+          <p:cNvPr id="20" name="Text 17"/>
+          <p:cNvSpPr txBox="1"/>
+          <p:nvPr/>
+        </p:nvSpPr>
+        <p:spPr>
+          <a:xfrm>
+            <a:off x="8041716" y="91440"/>
+            <a:ext cx="3564763" cy="274320"/>
+          </a:xfrm>
+          <a:prstGeom prst="rect">
+            <a:avLst/>
+          </a:prstGeom>
+          <a:noFill/>
+          <a:ln/>
+        </p:spPr>
+        <p:txBody>
+          <a:bodyPr wrap="square" lIns="0" tIns="0" rIns="0" bIns="0" rtlCol="0" anchor="ctr"/>
+          <a:lstStyle/>
+          <a:p>
+            <a:pPr indent="0" marL="0">
+              <a:buNone/>
+            </a:pPr>
+            <a:r>
+              <a:rPr lang="en-US" sz="1100" b="1" dirty="0">
+                <a:solidFill>
+                  <a:srgbClr val="075985"/>
+                </a:solidFill>
+                <a:latin typeface="Calibri" pitchFamily="34" charset="0"/>
+                <a:ea typeface="Calibri" pitchFamily="34" charset="-122"/>
+                <a:cs typeface="Calibri" pitchFamily="34" charset="-120"/>
+              </a:rPr>
+              <a:t>DA COMPRENDERE OGGI</a:t>
+            </a:r>
+            <a:pPr indent="0" marL="0">
+              <a:buNone/>
+            </a:pPr>
+            <a:r>
+              <a:rPr lang="en-US" sz="1100" dirty="0">
+                <a:solidFill>
+                  <a:srgbClr val="075985"/>
+                </a:solidFill>
+                <a:latin typeface="Calibri" pitchFamily="34" charset="0"/>
+                <a:ea typeface="Calibri" pitchFamily="34" charset="-122"/>
+                <a:cs typeface="Calibri" pitchFamily="34" charset="-120"/>
+              </a:rPr>
+              <a:t> · gli ingressi con pull-up</a:t>
+            </a:r>
+            <a:endParaRPr lang="en-US" sz="1100" dirty="0"/>
           </a:p>
         </p:txBody>
       </p:sp>
@@ -10559,6 +11720,133 @@
       </p:graphicFrame>
       <p:sp>
         <p:nvSpPr>
+          <p:cNvPr id="4" name="Shape 1"/>
+          <p:cNvSpPr/>
+          <p:nvPr/>
+        </p:nvSpPr>
+        <p:spPr>
+          <a:xfrm>
+            <a:off x="7657668" y="91440"/>
+            <a:ext cx="3985387" cy="274320"/>
+          </a:xfrm>
+          <a:prstGeom prst="rect">
+            <a:avLst/>
+          </a:prstGeom>
+          <a:solidFill>
+            <a:srgbClr val="E0F2FE"/>
+          </a:solidFill>
+          <a:ln w="12700">
+            <a:solidFill>
+              <a:srgbClr val="0369A1"/>
+            </a:solidFill>
+            <a:prstDash val="solid"/>
+          </a:ln>
+        </p:spPr>
+      </p:sp>
+      <p:sp>
+        <p:nvSpPr>
+          <p:cNvPr id="5" name="Shape 2"/>
+          <p:cNvSpPr/>
+          <p:nvPr/>
+        </p:nvSpPr>
+        <p:spPr>
+          <a:xfrm>
+            <a:off x="7657668" y="91440"/>
+            <a:ext cx="73152" cy="274320"/>
+          </a:xfrm>
+          <a:prstGeom prst="rect">
+            <a:avLst/>
+          </a:prstGeom>
+          <a:solidFill>
+            <a:srgbClr val="0369A1"/>
+          </a:solidFill>
+          <a:ln w="12700">
+            <a:solidFill>
+              <a:srgbClr val="0369A1"/>
+            </a:solidFill>
+            <a:prstDash val="solid"/>
+          </a:ln>
+        </p:spPr>
+      </p:sp>
+      <p:pic>
+        <p:nvPicPr>
+          <p:cNvPr id="6" name="Image 0" descr="preencoded.png">    </p:cNvPr>
+          <p:cNvPicPr>
+            <a:picLocks noChangeAspect="1"/>
+          </p:cNvPicPr>
+          <p:nvPr/>
+        </p:nvPicPr>
+        <p:blipFill>
+          <a:blip r:embed="rId1"/>
+          <a:stretch>
+            <a:fillRect/>
+          </a:stretch>
+        </p:blipFill>
+        <p:spPr>
+          <a:xfrm>
+            <a:off x="7785684" y="128016"/>
+            <a:ext cx="201168" cy="201168"/>
+          </a:xfrm>
+          <a:prstGeom prst="rect">
+            <a:avLst/>
+          </a:prstGeom>
+        </p:spPr>
+      </p:pic>
+      <p:sp>
+        <p:nvSpPr>
+          <p:cNvPr id="7" name="Text 3"/>
+          <p:cNvSpPr txBox="1"/>
+          <p:nvPr/>
+        </p:nvSpPr>
+        <p:spPr>
+          <a:xfrm>
+            <a:off x="8041716" y="91440"/>
+            <a:ext cx="3564763" cy="274320"/>
+          </a:xfrm>
+          <a:prstGeom prst="rect">
+            <a:avLst/>
+          </a:prstGeom>
+          <a:noFill/>
+          <a:ln/>
+        </p:spPr>
+        <p:txBody>
+          <a:bodyPr wrap="square" lIns="0" tIns="0" rIns="0" bIns="0" rtlCol="0" anchor="ctr"/>
+          <a:lstStyle/>
+          <a:p>
+            <a:pPr indent="0" marL="0">
+              <a:buNone/>
+            </a:pPr>
+            <a:r>
+              <a:rPr lang="en-US" sz="1100" b="1" dirty="0">
+                <a:solidFill>
+                  <a:srgbClr val="075985"/>
+                </a:solidFill>
+                <a:latin typeface="Calibri" pitchFamily="34" charset="0"/>
+                <a:ea typeface="Calibri" pitchFamily="34" charset="-122"/>
+                <a:cs typeface="Calibri" pitchFamily="34" charset="-120"/>
+              </a:rPr>
+              <a:t>DA COMPRENDERE OGGI</a:t>
+            </a:r>
+            <a:pPr indent="0" marL="0">
+              <a:buNone/>
+            </a:pPr>
+            <a:r>
+              <a:rPr lang="en-US" sz="1100" dirty="0">
+                <a:solidFill>
+                  <a:srgbClr val="075985"/>
+                </a:solidFill>
+                <a:latin typeface="Calibri" pitchFamily="34" charset="0"/>
+                <a:ea typeface="Calibri" pitchFamily="34" charset="-122"/>
+                <a:cs typeface="Calibri" pitchFamily="34" charset="-120"/>
+              </a:rPr>
+              <a:t> · gli ingressi con pull-up</a:t>
+            </a:r>
+            <a:endParaRPr lang="en-US" sz="1100" dirty="0"/>
+          </a:p>
+        </p:txBody>
+      </p:sp>
+      <p:sp>
+        <p:nvSpPr>
           <p:cNvPr id="25" name="Slide Number Placeholder 0"/>
           <p:cNvSpPr>
             <a:spLocks noGrp="1"/>
@@ -11071,6 +12359,133 @@
       </p:sp>
       <p:sp>
         <p:nvSpPr>
+          <p:cNvPr id="15" name="Shape 12"/>
+          <p:cNvSpPr/>
+          <p:nvPr/>
+        </p:nvSpPr>
+        <p:spPr>
+          <a:xfrm>
+            <a:off x="7657668" y="91440"/>
+            <a:ext cx="3985387" cy="274320"/>
+          </a:xfrm>
+          <a:prstGeom prst="rect">
+            <a:avLst/>
+          </a:prstGeom>
+          <a:solidFill>
+            <a:srgbClr val="E0F2FE"/>
+          </a:solidFill>
+          <a:ln w="12700">
+            <a:solidFill>
+              <a:srgbClr val="0369A1"/>
+            </a:solidFill>
+            <a:prstDash val="solid"/>
+          </a:ln>
+        </p:spPr>
+      </p:sp>
+      <p:sp>
+        <p:nvSpPr>
+          <p:cNvPr id="16" name="Shape 13"/>
+          <p:cNvSpPr/>
+          <p:nvPr/>
+        </p:nvSpPr>
+        <p:spPr>
+          <a:xfrm>
+            <a:off x="7657668" y="91440"/>
+            <a:ext cx="73152" cy="274320"/>
+          </a:xfrm>
+          <a:prstGeom prst="rect">
+            <a:avLst/>
+          </a:prstGeom>
+          <a:solidFill>
+            <a:srgbClr val="0369A1"/>
+          </a:solidFill>
+          <a:ln w="12700">
+            <a:solidFill>
+              <a:srgbClr val="0369A1"/>
+            </a:solidFill>
+            <a:prstDash val="solid"/>
+          </a:ln>
+        </p:spPr>
+      </p:sp>
+      <p:pic>
+        <p:nvPicPr>
+          <p:cNvPr id="17" name="Image 1" descr="preencoded.png">    </p:cNvPr>
+          <p:cNvPicPr>
+            <a:picLocks noChangeAspect="1"/>
+          </p:cNvPicPr>
+          <p:nvPr/>
+        </p:nvPicPr>
+        <p:blipFill>
+          <a:blip r:embed="rId2"/>
+          <a:stretch>
+            <a:fillRect/>
+          </a:stretch>
+        </p:blipFill>
+        <p:spPr>
+          <a:xfrm>
+            <a:off x="7785684" y="128016"/>
+            <a:ext cx="201168" cy="201168"/>
+          </a:xfrm>
+          <a:prstGeom prst="rect">
+            <a:avLst/>
+          </a:prstGeom>
+        </p:spPr>
+      </p:pic>
+      <p:sp>
+        <p:nvSpPr>
+          <p:cNvPr id="18" name="Text 14"/>
+          <p:cNvSpPr txBox="1"/>
+          <p:nvPr/>
+        </p:nvSpPr>
+        <p:spPr>
+          <a:xfrm>
+            <a:off x="8041716" y="91440"/>
+            <a:ext cx="3564763" cy="274320"/>
+          </a:xfrm>
+          <a:prstGeom prst="rect">
+            <a:avLst/>
+          </a:prstGeom>
+          <a:noFill/>
+          <a:ln/>
+        </p:spPr>
+        <p:txBody>
+          <a:bodyPr wrap="square" lIns="0" tIns="0" rIns="0" bIns="0" rtlCol="0" anchor="ctr"/>
+          <a:lstStyle/>
+          <a:p>
+            <a:pPr indent="0" marL="0">
+              <a:buNone/>
+            </a:pPr>
+            <a:r>
+              <a:rPr lang="en-US" sz="1100" b="1" dirty="0">
+                <a:solidFill>
+                  <a:srgbClr val="075985"/>
+                </a:solidFill>
+                <a:latin typeface="Calibri" pitchFamily="34" charset="0"/>
+                <a:ea typeface="Calibri" pitchFamily="34" charset="-122"/>
+                <a:cs typeface="Calibri" pitchFamily="34" charset="-120"/>
+              </a:rPr>
+              <a:t>DA COMPRENDERE OGGI</a:t>
+            </a:r>
+            <a:pPr indent="0" marL="0">
+              <a:buNone/>
+            </a:pPr>
+            <a:r>
+              <a:rPr lang="en-US" sz="1100" dirty="0">
+                <a:solidFill>
+                  <a:srgbClr val="075985"/>
+                </a:solidFill>
+                <a:latin typeface="Calibri" pitchFamily="34" charset="0"/>
+                <a:ea typeface="Calibri" pitchFamily="34" charset="-122"/>
+                <a:cs typeface="Calibri" pitchFamily="34" charset="-120"/>
+              </a:rPr>
+              <a:t> · gli ingressi con pull-up</a:t>
+            </a:r>
+            <a:endParaRPr lang="en-US" sz="1100" dirty="0"/>
+          </a:p>
+        </p:txBody>
+      </p:sp>
+      <p:sp>
+        <p:nvSpPr>
           <p:cNvPr id="25" name="Slide Number Placeholder 0"/>
           <p:cNvSpPr>
             <a:spLocks noGrp="1"/>
@@ -11574,6 +12989,158 @@
       </p:sp>
       <p:sp>
         <p:nvSpPr>
+          <p:cNvPr id="5" name="Shape 3"/>
+          <p:cNvSpPr/>
+          <p:nvPr/>
+        </p:nvSpPr>
+        <p:spPr>
+          <a:xfrm>
+            <a:off x="7941259" y="91440"/>
+            <a:ext cx="3701796" cy="274320"/>
+          </a:xfrm>
+          <a:prstGeom prst="rect">
+            <a:avLst/>
+          </a:prstGeom>
+          <a:solidFill>
+            <a:srgbClr val="FEF3C7"/>
+          </a:solidFill>
+          <a:ln w="12700">
+            <a:solidFill>
+              <a:srgbClr val="B45309"/>
+            </a:solidFill>
+            <a:prstDash val="solid"/>
+          </a:ln>
+        </p:spPr>
+      </p:sp>
+      <p:sp>
+        <p:nvSpPr>
+          <p:cNvPr id="6" name="Shape 4"/>
+          <p:cNvSpPr/>
+          <p:nvPr/>
+        </p:nvSpPr>
+        <p:spPr>
+          <a:xfrm>
+            <a:off x="7941259" y="91440"/>
+            <a:ext cx="27432" cy="274320"/>
+          </a:xfrm>
+          <a:prstGeom prst="rect">
+            <a:avLst/>
+          </a:prstGeom>
+          <a:solidFill>
+            <a:srgbClr val="B45309"/>
+          </a:solidFill>
+          <a:ln w="12700">
+            <a:solidFill>
+              <a:srgbClr val="B45309"/>
+            </a:solidFill>
+            <a:prstDash val="solid"/>
+          </a:ln>
+        </p:spPr>
+      </p:sp>
+      <p:sp>
+        <p:nvSpPr>
+          <p:cNvPr id="7" name="Shape 5"/>
+          <p:cNvSpPr/>
+          <p:nvPr/>
+        </p:nvSpPr>
+        <p:spPr>
+          <a:xfrm>
+            <a:off x="7996123" y="91440"/>
+            <a:ext cx="27432" cy="274320"/>
+          </a:xfrm>
+          <a:prstGeom prst="rect">
+            <a:avLst/>
+          </a:prstGeom>
+          <a:solidFill>
+            <a:srgbClr val="B45309"/>
+          </a:solidFill>
+          <a:ln w="12700">
+            <a:solidFill>
+              <a:srgbClr val="B45309"/>
+            </a:solidFill>
+            <a:prstDash val="solid"/>
+          </a:ln>
+        </p:spPr>
+      </p:sp>
+      <p:pic>
+        <p:nvPicPr>
+          <p:cNvPr id="8" name="Image 0" descr="preencoded.png">    </p:cNvPr>
+          <p:cNvPicPr>
+            <a:picLocks noChangeAspect="1"/>
+          </p:cNvPicPr>
+          <p:nvPr/>
+        </p:nvPicPr>
+        <p:blipFill>
+          <a:blip r:embed="rId1"/>
+          <a:stretch>
+            <a:fillRect/>
+          </a:stretch>
+        </p:blipFill>
+        <p:spPr>
+          <a:xfrm>
+            <a:off x="8069275" y="128016"/>
+            <a:ext cx="201168" cy="201168"/>
+          </a:xfrm>
+          <a:prstGeom prst="rect">
+            <a:avLst/>
+          </a:prstGeom>
+        </p:spPr>
+      </p:pic>
+      <p:sp>
+        <p:nvSpPr>
+          <p:cNvPr id="9" name="Text 6"/>
+          <p:cNvSpPr txBox="1"/>
+          <p:nvPr/>
+        </p:nvSpPr>
+        <p:spPr>
+          <a:xfrm>
+            <a:off x="8325307" y="91440"/>
+            <a:ext cx="3281172" cy="274320"/>
+          </a:xfrm>
+          <a:prstGeom prst="rect">
+            <a:avLst/>
+          </a:prstGeom>
+          <a:noFill/>
+          <a:ln/>
+        </p:spPr>
+        <p:txBody>
+          <a:bodyPr wrap="square" lIns="0" tIns="0" rIns="0" bIns="0" rtlCol="0" anchor="ctr"/>
+          <a:lstStyle/>
+          <a:p>
+            <a:pPr indent="0" marL="0">
+              <a:buNone/>
+            </a:pPr>
+            <a:r>
+              <a:rPr lang="en-US" sz="1100" b="1" dirty="0">
+                <a:solidFill>
+                  <a:srgbClr val="92400E"/>
+                </a:solidFill>
+                <a:latin typeface="Calibri" pitchFamily="34" charset="0"/>
+                <a:ea typeface="Calibri" pitchFamily="34" charset="-122"/>
+                <a:cs typeface="Calibri" pitchFamily="34" charset="-120"/>
+              </a:rPr>
+              <a:t>DA UTILIZZARE OGGI</a:t>
+            </a:r>
+            <a:pPr indent="0" marL="0">
+              <a:buNone/>
+            </a:pPr>
+            <a:r>
+              <a:rPr lang="en-US" sz="1100" dirty="0">
+                <a:solidFill>
+                  <a:srgbClr val="92400E"/>
+                </a:solidFill>
+                <a:latin typeface="Calibri" pitchFamily="34" charset="0"/>
+                <a:ea typeface="Calibri" pitchFamily="34" charset="-122"/>
+                <a:cs typeface="Calibri" pitchFamily="34" charset="-120"/>
+              </a:rPr>
+              <a:t> · il programma completo</a:t>
+            </a:r>
+            <a:endParaRPr lang="en-US" sz="1100" dirty="0"/>
+          </a:p>
+        </p:txBody>
+      </p:sp>
+      <p:sp>
+        <p:nvSpPr>
           <p:cNvPr id="25" name="Slide Number Placeholder 0"/>
           <p:cNvSpPr>
             <a:spLocks noGrp="1"/>
@@ -12034,6 +13601,158 @@
       </p:sp>
       <p:sp>
         <p:nvSpPr>
+          <p:cNvPr id="5" name="Shape 3"/>
+          <p:cNvSpPr/>
+          <p:nvPr/>
+        </p:nvSpPr>
+        <p:spPr>
+          <a:xfrm>
+            <a:off x="7941259" y="91440"/>
+            <a:ext cx="3701796" cy="274320"/>
+          </a:xfrm>
+          <a:prstGeom prst="rect">
+            <a:avLst/>
+          </a:prstGeom>
+          <a:solidFill>
+            <a:srgbClr val="FEF3C7"/>
+          </a:solidFill>
+          <a:ln w="12700">
+            <a:solidFill>
+              <a:srgbClr val="B45309"/>
+            </a:solidFill>
+            <a:prstDash val="solid"/>
+          </a:ln>
+        </p:spPr>
+      </p:sp>
+      <p:sp>
+        <p:nvSpPr>
+          <p:cNvPr id="6" name="Shape 4"/>
+          <p:cNvSpPr/>
+          <p:nvPr/>
+        </p:nvSpPr>
+        <p:spPr>
+          <a:xfrm>
+            <a:off x="7941259" y="91440"/>
+            <a:ext cx="27432" cy="274320"/>
+          </a:xfrm>
+          <a:prstGeom prst="rect">
+            <a:avLst/>
+          </a:prstGeom>
+          <a:solidFill>
+            <a:srgbClr val="B45309"/>
+          </a:solidFill>
+          <a:ln w="12700">
+            <a:solidFill>
+              <a:srgbClr val="B45309"/>
+            </a:solidFill>
+            <a:prstDash val="solid"/>
+          </a:ln>
+        </p:spPr>
+      </p:sp>
+      <p:sp>
+        <p:nvSpPr>
+          <p:cNvPr id="7" name="Shape 5"/>
+          <p:cNvSpPr/>
+          <p:nvPr/>
+        </p:nvSpPr>
+        <p:spPr>
+          <a:xfrm>
+            <a:off x="7996123" y="91440"/>
+            <a:ext cx="27432" cy="274320"/>
+          </a:xfrm>
+          <a:prstGeom prst="rect">
+            <a:avLst/>
+          </a:prstGeom>
+          <a:solidFill>
+            <a:srgbClr val="B45309"/>
+          </a:solidFill>
+          <a:ln w="12700">
+            <a:solidFill>
+              <a:srgbClr val="B45309"/>
+            </a:solidFill>
+            <a:prstDash val="solid"/>
+          </a:ln>
+        </p:spPr>
+      </p:sp>
+      <p:pic>
+        <p:nvPicPr>
+          <p:cNvPr id="8" name="Image 0" descr="preencoded.png">    </p:cNvPr>
+          <p:cNvPicPr>
+            <a:picLocks noChangeAspect="1"/>
+          </p:cNvPicPr>
+          <p:nvPr/>
+        </p:nvPicPr>
+        <p:blipFill>
+          <a:blip r:embed="rId1"/>
+          <a:stretch>
+            <a:fillRect/>
+          </a:stretch>
+        </p:blipFill>
+        <p:spPr>
+          <a:xfrm>
+            <a:off x="8069275" y="128016"/>
+            <a:ext cx="201168" cy="201168"/>
+          </a:xfrm>
+          <a:prstGeom prst="rect">
+            <a:avLst/>
+          </a:prstGeom>
+        </p:spPr>
+      </p:pic>
+      <p:sp>
+        <p:nvSpPr>
+          <p:cNvPr id="9" name="Text 6"/>
+          <p:cNvSpPr txBox="1"/>
+          <p:nvPr/>
+        </p:nvSpPr>
+        <p:spPr>
+          <a:xfrm>
+            <a:off x="8325307" y="91440"/>
+            <a:ext cx="3281172" cy="274320"/>
+          </a:xfrm>
+          <a:prstGeom prst="rect">
+            <a:avLst/>
+          </a:prstGeom>
+          <a:noFill/>
+          <a:ln/>
+        </p:spPr>
+        <p:txBody>
+          <a:bodyPr wrap="square" lIns="0" tIns="0" rIns="0" bIns="0" rtlCol="0" anchor="ctr"/>
+          <a:lstStyle/>
+          <a:p>
+            <a:pPr indent="0" marL="0">
+              <a:buNone/>
+            </a:pPr>
+            <a:r>
+              <a:rPr lang="en-US" sz="1100" b="1" dirty="0">
+                <a:solidFill>
+                  <a:srgbClr val="92400E"/>
+                </a:solidFill>
+                <a:latin typeface="Calibri" pitchFamily="34" charset="0"/>
+                <a:ea typeface="Calibri" pitchFamily="34" charset="-122"/>
+                <a:cs typeface="Calibri" pitchFamily="34" charset="-120"/>
+              </a:rPr>
+              <a:t>DA UTILIZZARE OGGI</a:t>
+            </a:r>
+            <a:pPr indent="0" marL="0">
+              <a:buNone/>
+            </a:pPr>
+            <a:r>
+              <a:rPr lang="en-US" sz="1100" dirty="0">
+                <a:solidFill>
+                  <a:srgbClr val="92400E"/>
+                </a:solidFill>
+                <a:latin typeface="Calibri" pitchFamily="34" charset="0"/>
+                <a:ea typeface="Calibri" pitchFamily="34" charset="-122"/>
+                <a:cs typeface="Calibri" pitchFamily="34" charset="-120"/>
+              </a:rPr>
+              <a:t> · il programma completo</a:t>
+            </a:r>
+            <a:endParaRPr lang="en-US" sz="1100" dirty="0"/>
+          </a:p>
+        </p:txBody>
+      </p:sp>
+      <p:sp>
+        <p:nvSpPr>
           <p:cNvPr id="25" name="Slide Number Placeholder 0"/>
           <p:cNvSpPr>
             <a:spLocks noGrp="1"/>
@@ -12549,6 +14268,158 @@
               <a:t>pressed: .word 0</a:t>
             </a:r>
             <a:endParaRPr lang="en-US" sz="1350" dirty="0"/>
+          </a:p>
+        </p:txBody>
+      </p:sp>
+      <p:sp>
+        <p:nvSpPr>
+          <p:cNvPr id="5" name="Shape 3"/>
+          <p:cNvSpPr/>
+          <p:nvPr/>
+        </p:nvSpPr>
+        <p:spPr>
+          <a:xfrm>
+            <a:off x="7941259" y="91440"/>
+            <a:ext cx="3701796" cy="274320"/>
+          </a:xfrm>
+          <a:prstGeom prst="rect">
+            <a:avLst/>
+          </a:prstGeom>
+          <a:solidFill>
+            <a:srgbClr val="FEF3C7"/>
+          </a:solidFill>
+          <a:ln w="12700">
+            <a:solidFill>
+              <a:srgbClr val="B45309"/>
+            </a:solidFill>
+            <a:prstDash val="solid"/>
+          </a:ln>
+        </p:spPr>
+      </p:sp>
+      <p:sp>
+        <p:nvSpPr>
+          <p:cNvPr id="6" name="Shape 4"/>
+          <p:cNvSpPr/>
+          <p:nvPr/>
+        </p:nvSpPr>
+        <p:spPr>
+          <a:xfrm>
+            <a:off x="7941259" y="91440"/>
+            <a:ext cx="27432" cy="274320"/>
+          </a:xfrm>
+          <a:prstGeom prst="rect">
+            <a:avLst/>
+          </a:prstGeom>
+          <a:solidFill>
+            <a:srgbClr val="B45309"/>
+          </a:solidFill>
+          <a:ln w="12700">
+            <a:solidFill>
+              <a:srgbClr val="B45309"/>
+            </a:solidFill>
+            <a:prstDash val="solid"/>
+          </a:ln>
+        </p:spPr>
+      </p:sp>
+      <p:sp>
+        <p:nvSpPr>
+          <p:cNvPr id="7" name="Shape 5"/>
+          <p:cNvSpPr/>
+          <p:nvPr/>
+        </p:nvSpPr>
+        <p:spPr>
+          <a:xfrm>
+            <a:off x="7996123" y="91440"/>
+            <a:ext cx="27432" cy="274320"/>
+          </a:xfrm>
+          <a:prstGeom prst="rect">
+            <a:avLst/>
+          </a:prstGeom>
+          <a:solidFill>
+            <a:srgbClr val="B45309"/>
+          </a:solidFill>
+          <a:ln w="12700">
+            <a:solidFill>
+              <a:srgbClr val="B45309"/>
+            </a:solidFill>
+            <a:prstDash val="solid"/>
+          </a:ln>
+        </p:spPr>
+      </p:sp>
+      <p:pic>
+        <p:nvPicPr>
+          <p:cNvPr id="8" name="Image 0" descr="preencoded.png">    </p:cNvPr>
+          <p:cNvPicPr>
+            <a:picLocks noChangeAspect="1"/>
+          </p:cNvPicPr>
+          <p:nvPr/>
+        </p:nvPicPr>
+        <p:blipFill>
+          <a:blip r:embed="rId1"/>
+          <a:stretch>
+            <a:fillRect/>
+          </a:stretch>
+        </p:blipFill>
+        <p:spPr>
+          <a:xfrm>
+            <a:off x="8069275" y="128016"/>
+            <a:ext cx="201168" cy="201168"/>
+          </a:xfrm>
+          <a:prstGeom prst="rect">
+            <a:avLst/>
+          </a:prstGeom>
+        </p:spPr>
+      </p:pic>
+      <p:sp>
+        <p:nvSpPr>
+          <p:cNvPr id="9" name="Text 6"/>
+          <p:cNvSpPr txBox="1"/>
+          <p:nvPr/>
+        </p:nvSpPr>
+        <p:spPr>
+          <a:xfrm>
+            <a:off x="8325307" y="91440"/>
+            <a:ext cx="3281172" cy="274320"/>
+          </a:xfrm>
+          <a:prstGeom prst="rect">
+            <a:avLst/>
+          </a:prstGeom>
+          <a:noFill/>
+          <a:ln/>
+        </p:spPr>
+        <p:txBody>
+          <a:bodyPr wrap="square" lIns="0" tIns="0" rIns="0" bIns="0" rtlCol="0" anchor="ctr"/>
+          <a:lstStyle/>
+          <a:p>
+            <a:pPr indent="0" marL="0">
+              <a:buNone/>
+            </a:pPr>
+            <a:r>
+              <a:rPr lang="en-US" sz="1100" b="1" dirty="0">
+                <a:solidFill>
+                  <a:srgbClr val="92400E"/>
+                </a:solidFill>
+                <a:latin typeface="Calibri" pitchFamily="34" charset="0"/>
+                <a:ea typeface="Calibri" pitchFamily="34" charset="-122"/>
+                <a:cs typeface="Calibri" pitchFamily="34" charset="-120"/>
+              </a:rPr>
+              <a:t>DA UTILIZZARE OGGI</a:t>
+            </a:r>
+            <a:pPr indent="0" marL="0">
+              <a:buNone/>
+            </a:pPr>
+            <a:r>
+              <a:rPr lang="en-US" sz="1100" dirty="0">
+                <a:solidFill>
+                  <a:srgbClr val="92400E"/>
+                </a:solidFill>
+                <a:latin typeface="Calibri" pitchFamily="34" charset="0"/>
+                <a:ea typeface="Calibri" pitchFamily="34" charset="-122"/>
+                <a:cs typeface="Calibri" pitchFamily="34" charset="-120"/>
+              </a:rPr>
+              <a:t> · il programma completo</a:t>
+            </a:r>
+            <a:endParaRPr lang="en-US" sz="1100" dirty="0"/>
           </a:p>
         </p:txBody>
       </p:sp>

--- a/it/slides/10-Architettura_dei_Calcolatori-Elettronica-Codice.pptx
+++ b/it/slides/10-Architettura_dei_Calcolatori-Elettronica-Codice.pptx
@@ -120,31 +120,31 @@
   <p:extLst>
     <p:ext uri="{521415D9-36F7-43E2-AB2F-B90AF26B5E84}">
       <p14:sectionLst xmlns:p14="http://schemas.microsoft.com/office/powerpoint/2010/main">
-        <p14:section name="Apertura" id="{deca3e7a-f479-9685-6176-e06b5fe2b85c}">
+        <p14:section name="Apertura" id="{1675ee51-63bf-6cb2-8f4d-1c24c39c8315}">
           <p14:sldIdLst>
             <p14:sldId id="256"/>
             <p14:sldId id="257"/>
           </p14:sldIdLst>
         </p14:section>
-        <p14:section name="Riscaldamento sulla macchina" id="{b513bbdd-11b3-c4e2-5905-e90d5f5968f8}">
+        <p14:section name="Riscaldamento sulla macchina" id="{a1969374-ec52-7a31-4436-337a0e8d49a6}">
           <p14:sldIdLst>
             <p14:sldId id="258"/>
           </p14:sldIdLst>
         </p14:section>
-        <p14:section name="Ritorno alla macchina" id="{79a738a7-60c1-ba7a-aceb-759f460a1019}">
+        <p14:section name="Ritorno alla macchina" id="{e6ae92d3-0beb-6f53-4b8c-ced0d510e987}">
           <p14:sldIdLst>
             <p14:sldId id="259"/>
             <p14:sldId id="260"/>
           </p14:sldIdLst>
         </p14:section>
-        <p14:section name="Il programma completo" id="{bbc99b38-f833-b007-eab4-688399725308}">
+        <p14:section name="Il programma completo" id="{372c1057-f65e-53dd-4182-c45c5a22b1d5}">
           <p14:sldIdLst>
             <p14:sldId id="261"/>
             <p14:sldId id="262"/>
             <p14:sldId id="263"/>
           </p14:sldIdLst>
         </p14:section>
-        <p14:section name="Eseguire e provare" id="{c061edb2-f311-9f62-2c92-1385be9fe99b}">
+        <p14:section name="Eseguire e provare" id="{6ccea177-ae29-6875-e05d-56433b41ff5d}">
           <p14:sldIdLst>
             <p14:sldId id="264"/>
             <p14:sldId id="265"/>
@@ -153,7 +153,7 @@
             <p14:sldId id="268"/>
           </p14:sldIdLst>
         </p14:section>
-        <p14:section name="Esercizi" id="{c1ef6ea5-3420-7285-0377-5627dc806f30}">
+        <p14:section name="Esercizi" id="{cf295092-eab7-ed1d-198e-b63bc4042e82}">
           <p14:sldIdLst>
             <p14:sldId id="269"/>
           </p14:sldIdLst>
